--- a/public/fun/pack/pptx/birthdaypro/돌잔치프리미엄_23_사진중심_터콰이즈골드.pptx
+++ b/public/fun/pack/pptx/birthdaypro/돌잔치프리미엄_23_사진중심_터콰이즈골드.pptx
@@ -112,12 +112,12 @@
   <p:extLst>
     <p:ext uri="{521415D9-36F7-43E2-AB2F-B90AF26B5E84}">
       <p14:sectionLst xmlns:p14="http://schemas.microsoft.com/office/powerpoint/2010/main">
-        <p14:section name="시작" id="{B7050900-FEBB-4ABD-89D9-9D353B25A36D}">
+        <p14:section name="시작" id="{AF305AFF-63DD-4E5C-BA7E-4B65D1709B8B}">
           <p14:sldIdLst>
             <p14:sldId id="256"/>
           </p14:sldIdLst>
         </p14:section>
-        <p14:section name="본문" id="{D60A83F8-E387-4DFA-84C9-CC48D7358B65}">
+        <p14:section name="본문" id="{98CB2224-2476-4881-B907-3DCD38C09B35}">
           <p14:sldIdLst>
             <p14:sldId id="257"/>
             <p14:sldId id="258"/>
@@ -125,7 +125,7 @@
             <p14:sldId id="260"/>
           </p14:sldIdLst>
         </p14:section>
-        <p14:section name="마무리" id="{F8F20473-61AB-49B3-A661-941841DE4EAA}">
+        <p14:section name="마무리" id="{4C3657CF-B83F-477E-AF4D-D90FB750EE83}">
           <p14:sldIdLst>
             <p14:sldId id="261"/>
           </p14:sldIdLst>
@@ -1896,7 +1896,7 @@
             </a:lvl1pPr>
           </a:lstStyle>
           <a:p>
-            <a:fld id="{9CC273C9-F614-47FE-9AED-73ADD115D839}" type="slidenum">
+            <a:fld id="{87041B49-EC8A-40A8-ADEB-991BD4E3EC11}" type="slidenum">
               <a:rPr lang="en-US"/>
               <a:t>‹#›</a:t>
             </a:fld>
@@ -3326,7 +3326,7 @@
             </a:lvl1pPr>
           </a:lstStyle>
           <a:p>
-            <a:fld id="{401E7B5F-76DE-4E9D-BA96-ABFBDAD70075}" type="slidenum">
+            <a:fld id="{FEA70073-0D77-4314-BE14-F2B96FD5C0E3}" type="slidenum">
               <a:rPr lang="en-US"/>
               <a:t>‹#›</a:t>
             </a:fld>
@@ -4336,7 +4336,7 @@
             </a:lvl1pPr>
           </a:lstStyle>
           <a:p>
-            <a:fld id="{9C975690-241D-4284-B99D-26F8E720F7D6}" type="slidenum">
+            <a:fld id="{BDCB31ED-2A29-4DB9-BAAE-A8DA3BCCFA93}" type="slidenum">
               <a:rPr lang="en-US"/>
               <a:t>‹#›</a:t>
             </a:fld>
@@ -5477,7 +5477,7 @@
           <a:p>
             <a:r>
               <a:rPr lang="ko-KR"/>
-              <a:t>여름 바닷가에서 찍은 첫 사진도 있습니다</a:t>
+              <a:t>바닷가에서 찍은 첫 사진도 있습니다</a:t>
             </a:r>
           </a:p>
         </p:txBody>
@@ -5499,7 +5499,7 @@
           <a:p>
             <a:r>
               <a:rPr lang="ko-KR"/>
-              <a:t>아기 이름 · 0000. 00. 00</a:t>
+              <a:t>아기 이름 · 날짜 입력</a:t>
             </a:r>
           </a:p>
           <a:p>
@@ -5660,7 +5660,7 @@
           <a:bodyPr/>
           <a:lstStyle/>
           <a:p>
-            <a:fld id="{65BBFD18-4501-470F-ABD9-56BBA177F74B}" type="slidenum">
+            <a:fld id="{BAAED50E-8877-4F2D-81F3-916742CED3B3}" type="slidenum">
               <a:rPr lang="en-US"/>
               <a:t>‹#›</a:t>
             </a:fld>
@@ -6400,7 +6400,7 @@
           <a:bodyPr/>
           <a:lstStyle/>
           <a:p>
-            <a:fld id="{0CC49653-8842-4B76-AFD8-6A24C515E8DF}" type="slidenum">
+            <a:fld id="{09C99B21-1AD3-4689-8619-9B3921524457}" type="slidenum">
               <a:rPr lang="en-US"/>
               <a:t>‹#›</a:t>
             </a:fld>
@@ -6488,7 +6488,7 @@
           <a:bodyPr/>
           <a:lstStyle/>
           <a:p>
-            <a:fld id="{BE9FF907-D366-4CBA-9655-CE680CF070EE}" type="slidenum">
+            <a:fld id="{0EBA4E7C-1A9C-4E32-B13B-EA7ECA3542E5}" type="slidenum">
               <a:rPr lang="en-US"/>
               <a:t>‹#›</a:t>
             </a:fld>
@@ -7998,7 +7998,7 @@
           <a:bodyPr/>
           <a:lstStyle/>
           <a:p>
-            <a:fld id="{84B4C36D-FD07-4861-BA44-6D8B33623962}" type="slidenum">
+            <a:fld id="{2388339B-6E5E-4B84-8BF9-7E9B7B968D72}" type="slidenum">
               <a:rPr lang="en-US"/>
               <a:t>‹#›</a:t>
             </a:fld>
